--- a/Documentation/WYVERN_E4_Presentation_Deck.pptx
+++ b/Documentation/WYVERN_E4_Presentation_Deck.pptx
@@ -551,7 +551,7 @@
           <a:p>
             <a:r>
               <a:rPr lang="en-US" dirty="0"/>
-              <a:t>Welcome. WYVERN-E 4.0 is Skylight Rocketry's single-stage active-TVC sustainer -- a five-question research program spanning actuator design, materials, aerodynamics, wind-tunnel calibration, and control-gain sensitivity. This is the full technical review.</a:t>
+              <a:t>Welcome. GTR70E WYVERN 4.0 is Skylight Rocketry's single-stage active-TVC sustainer -- a five-question research program spanning actuator design, materials, aerodynamics, wind-tunnel calibration, and control-gain sensitivity. This is the full technical review.</a:t>
             </a:r>
             <a:endParaRPr lang="en-US" dirty="0"/>
           </a:p>
@@ -5422,7 +5422,7 @@
                 <a:ea typeface="Arial" pitchFamily="34" charset="-122"/>
                 <a:cs typeface="Arial" pitchFamily="34" charset="-120"/>
               </a:rPr>
-              <a:t>WYVERN-E</a:t>
+              <a:t>GTR70E WYVERN</a:t>
             </a:r>
             <a:endParaRPr lang="en-US" sz="10500" dirty="0"/>
           </a:p>
